--- a/assets/wsb-sentiment-analysis.pptx
+++ b/assets/wsb-sentiment-analysis.pptx
@@ -214,7 +214,7 @@
           <a:p>
             <a:fld id="{C351A88A-AFD5-4BBC-AB42-87C4A1F182E5}" type="datetimeFigureOut">
               <a:rPr lang="en-IN" smtClean="0"/>
-              <a:t>08-02-2026</a:t>
+              <a:t>29-08-2026</a:t>
             </a:fld>
             <a:endParaRPr lang="en-IN"/>
           </a:p>
@@ -2871,7 +2871,7 @@
           <a:p>
             <a:fld id="{6A5DC351-8FE4-4E37-896C-B37328B7F24F}" type="datetimeFigureOut">
               <a:rPr lang="en-IN" smtClean="0"/>
-              <a:t>08-02-2026</a:t>
+              <a:t>29-08-2026</a:t>
             </a:fld>
             <a:endParaRPr lang="en-IN"/>
           </a:p>
@@ -3071,7 +3071,7 @@
           <a:p>
             <a:fld id="{6A5DC351-8FE4-4E37-896C-B37328B7F24F}" type="datetimeFigureOut">
               <a:rPr lang="en-IN" smtClean="0"/>
-              <a:t>08-02-2026</a:t>
+              <a:t>29-08-2026</a:t>
             </a:fld>
             <a:endParaRPr lang="en-IN"/>
           </a:p>
@@ -3281,7 +3281,7 @@
           <a:p>
             <a:fld id="{6A5DC351-8FE4-4E37-896C-B37328B7F24F}" type="datetimeFigureOut">
               <a:rPr lang="en-IN" smtClean="0"/>
-              <a:t>08-02-2026</a:t>
+              <a:t>29-08-2026</a:t>
             </a:fld>
             <a:endParaRPr lang="en-IN"/>
           </a:p>
@@ -5073,6 +5073,13 @@
             <a:tailEnd type="none" w="sm" len="sm"/>
           </a:ln>
         </p:spPr>
+        <p:txBody>
+          <a:bodyPr/>
+          <a:lstStyle/>
+          <a:p>
+            <a:endParaRPr lang="en-IN"/>
+          </a:p>
+        </p:txBody>
       </p:sp>
       <p:sp>
         <p:nvSpPr>
@@ -10373,7 +10380,7 @@
           <a:p>
             <a:fld id="{6A5DC351-8FE4-4E37-896C-B37328B7F24F}" type="datetimeFigureOut">
               <a:rPr lang="en-IN" smtClean="0"/>
-              <a:t>08-02-2026</a:t>
+              <a:t>29-08-2026</a:t>
             </a:fld>
             <a:endParaRPr lang="en-IN"/>
           </a:p>
@@ -10649,7 +10656,7 @@
           <a:p>
             <a:fld id="{6A5DC351-8FE4-4E37-896C-B37328B7F24F}" type="datetimeFigureOut">
               <a:rPr lang="en-IN" smtClean="0"/>
-              <a:t>08-02-2026</a:t>
+              <a:t>29-08-2026</a:t>
             </a:fld>
             <a:endParaRPr lang="en-IN"/>
           </a:p>
@@ -10917,7 +10924,7 @@
           <a:p>
             <a:fld id="{6A5DC351-8FE4-4E37-896C-B37328B7F24F}" type="datetimeFigureOut">
               <a:rPr lang="en-IN" smtClean="0"/>
-              <a:t>08-02-2026</a:t>
+              <a:t>29-08-2026</a:t>
             </a:fld>
             <a:endParaRPr lang="en-IN"/>
           </a:p>
@@ -11332,7 +11339,7 @@
           <a:p>
             <a:fld id="{6A5DC351-8FE4-4E37-896C-B37328B7F24F}" type="datetimeFigureOut">
               <a:rPr lang="en-IN" smtClean="0"/>
-              <a:t>08-02-2026</a:t>
+              <a:t>29-08-2026</a:t>
             </a:fld>
             <a:endParaRPr lang="en-IN"/>
           </a:p>
@@ -11474,7 +11481,7 @@
           <a:p>
             <a:fld id="{6A5DC351-8FE4-4E37-896C-B37328B7F24F}" type="datetimeFigureOut">
               <a:rPr lang="en-IN" smtClean="0"/>
-              <a:t>08-02-2026</a:t>
+              <a:t>29-08-2026</a:t>
             </a:fld>
             <a:endParaRPr lang="en-IN"/>
           </a:p>
@@ -11587,7 +11594,7 @@
           <a:p>
             <a:fld id="{6A5DC351-8FE4-4E37-896C-B37328B7F24F}" type="datetimeFigureOut">
               <a:rPr lang="en-IN" smtClean="0"/>
-              <a:t>08-02-2026</a:t>
+              <a:t>29-08-2026</a:t>
             </a:fld>
             <a:endParaRPr lang="en-IN"/>
           </a:p>
@@ -11900,7 +11907,7 @@
           <a:p>
             <a:fld id="{6A5DC351-8FE4-4E37-896C-B37328B7F24F}" type="datetimeFigureOut">
               <a:rPr lang="en-IN" smtClean="0"/>
-              <a:t>08-02-2026</a:t>
+              <a:t>29-08-2026</a:t>
             </a:fld>
             <a:endParaRPr lang="en-IN"/>
           </a:p>
@@ -12189,7 +12196,7 @@
           <a:p>
             <a:fld id="{6A5DC351-8FE4-4E37-896C-B37328B7F24F}" type="datetimeFigureOut">
               <a:rPr lang="en-IN" smtClean="0"/>
-              <a:t>08-02-2026</a:t>
+              <a:t>29-08-2026</a:t>
             </a:fld>
             <a:endParaRPr lang="en-IN"/>
           </a:p>
@@ -12432,7 +12439,7 @@
           <a:p>
             <a:fld id="{6A5DC351-8FE4-4E37-896C-B37328B7F24F}" type="datetimeFigureOut">
               <a:rPr lang="en-IN" smtClean="0"/>
-              <a:t>08-02-2026</a:t>
+              <a:t>29-08-2026</a:t>
             </a:fld>
             <a:endParaRPr lang="en-IN"/>
           </a:p>
@@ -12927,7 +12934,14 @@
                 <a:latin typeface="Arial" panose="020B0604020202020204" pitchFamily="34" charset="0"/>
                 <a:cs typeface="Arial" panose="020B0604020202020204" pitchFamily="34" charset="0"/>
               </a:rPr>
-              <a:t>Wisdom or Whims? Decoding sentimental analysis and build long-short portfolio</a:t>
+              <a:t>Wisdom or Whims? Decoding </a:t>
+            </a:r>
+            <a:r>
+              <a:rPr lang="en-IN" sz="4000" b="1">
+                <a:latin typeface="Arial" panose="020B0604020202020204" pitchFamily="34" charset="0"/>
+                <a:cs typeface="Arial" panose="020B0604020202020204" pitchFamily="34" charset="0"/>
+              </a:rPr>
+              <a:t>sentimental analysis</a:t>
             </a:r>
             <a:br>
               <a:rPr lang="en" sz="3733" dirty="0">
